--- a/Manuels/validations/Validation_EEGpal_2_2_pipeline.pptx
+++ b/Manuels/validations/Validation_EEGpal_2_2_pipeline.pptx
@@ -5,7 +5,7 @@
     <p:sldMasterId id="2147483648" r:id="rId1"/>
   </p:sldMasterIdLst>
   <p:notesMasterIdLst>
-    <p:notesMasterId r:id="rId8"/>
+    <p:notesMasterId r:id="rId13"/>
   </p:notesMasterIdLst>
   <p:sldIdLst>
     <p:sldId id="256" r:id="rId2"/>
@@ -14,6 +14,11 @@
     <p:sldId id="352" r:id="rId5"/>
     <p:sldId id="356" r:id="rId6"/>
     <p:sldId id="353" r:id="rId7"/>
+    <p:sldId id="357" r:id="rId8"/>
+    <p:sldId id="338" r:id="rId9"/>
+    <p:sldId id="339" r:id="rId10"/>
+    <p:sldId id="340" r:id="rId11"/>
+    <p:sldId id="341" r:id="rId12"/>
   </p:sldIdLst>
   <p:sldSz cx="12192000" cy="6858000"/>
   <p:notesSz cx="6858000" cy="9144000"/>
@@ -1628,7 +1633,7 @@
           <a:p>
             <a:fld id="{D5F102FA-BD0D-4527-B0F3-028D90335BEE}" type="datetimeFigureOut">
               <a:rPr lang="en-US" smtClean="0"/>
-              <a:t>10/7/2026</a:t>
+              <a:t>10/10/2026</a:t>
             </a:fld>
             <a:endParaRPr lang="en-US"/>
           </a:p>
@@ -2213,7 +2218,7 @@
           <a:p>
             <a:fld id="{2452FF62-8110-4E5B-9444-FF52BEC43877}" type="datetimeFigureOut">
               <a:rPr lang="en-US" smtClean="0"/>
-              <a:t>10/7/2026</a:t>
+              <a:t>10/10/2026</a:t>
             </a:fld>
             <a:endParaRPr lang="en-US"/>
           </a:p>
@@ -2411,7 +2416,7 @@
           <a:p>
             <a:fld id="{2452FF62-8110-4E5B-9444-FF52BEC43877}" type="datetimeFigureOut">
               <a:rPr lang="en-US" smtClean="0"/>
-              <a:t>10/7/2026</a:t>
+              <a:t>10/10/2026</a:t>
             </a:fld>
             <a:endParaRPr lang="en-US"/>
           </a:p>
@@ -2619,7 +2624,7 @@
           <a:p>
             <a:fld id="{2452FF62-8110-4E5B-9444-FF52BEC43877}" type="datetimeFigureOut">
               <a:rPr lang="en-US" smtClean="0"/>
-              <a:t>10/7/2026</a:t>
+              <a:t>10/10/2026</a:t>
             </a:fld>
             <a:endParaRPr lang="en-US"/>
           </a:p>
@@ -2817,7 +2822,7 @@
           <a:p>
             <a:fld id="{2452FF62-8110-4E5B-9444-FF52BEC43877}" type="datetimeFigureOut">
               <a:rPr lang="en-US" smtClean="0"/>
-              <a:t>10/7/2026</a:t>
+              <a:t>10/10/2026</a:t>
             </a:fld>
             <a:endParaRPr lang="en-US"/>
           </a:p>
@@ -3092,7 +3097,7 @@
           <a:p>
             <a:fld id="{2452FF62-8110-4E5B-9444-FF52BEC43877}" type="datetimeFigureOut">
               <a:rPr lang="en-US" smtClean="0"/>
-              <a:t>10/7/2026</a:t>
+              <a:t>10/10/2026</a:t>
             </a:fld>
             <a:endParaRPr lang="en-US"/>
           </a:p>
@@ -3357,7 +3362,7 @@
           <a:p>
             <a:fld id="{2452FF62-8110-4E5B-9444-FF52BEC43877}" type="datetimeFigureOut">
               <a:rPr lang="en-US" smtClean="0"/>
-              <a:t>10/7/2026</a:t>
+              <a:t>10/10/2026</a:t>
             </a:fld>
             <a:endParaRPr lang="en-US"/>
           </a:p>
@@ -3769,7 +3774,7 @@
           <a:p>
             <a:fld id="{2452FF62-8110-4E5B-9444-FF52BEC43877}" type="datetimeFigureOut">
               <a:rPr lang="en-US" smtClean="0"/>
-              <a:t>10/7/2026</a:t>
+              <a:t>10/10/2026</a:t>
             </a:fld>
             <a:endParaRPr lang="en-US"/>
           </a:p>
@@ -3910,7 +3915,7 @@
           <a:p>
             <a:fld id="{2452FF62-8110-4E5B-9444-FF52BEC43877}" type="datetimeFigureOut">
               <a:rPr lang="en-US" smtClean="0"/>
-              <a:t>10/7/2026</a:t>
+              <a:t>10/10/2026</a:t>
             </a:fld>
             <a:endParaRPr lang="en-US"/>
           </a:p>
@@ -4023,7 +4028,7 @@
           <a:p>
             <a:fld id="{2452FF62-8110-4E5B-9444-FF52BEC43877}" type="datetimeFigureOut">
               <a:rPr lang="en-US" smtClean="0"/>
-              <a:t>10/7/2026</a:t>
+              <a:t>10/10/2026</a:t>
             </a:fld>
             <a:endParaRPr lang="en-US"/>
           </a:p>
@@ -4334,7 +4339,7 @@
           <a:p>
             <a:fld id="{2452FF62-8110-4E5B-9444-FF52BEC43877}" type="datetimeFigureOut">
               <a:rPr lang="en-US" smtClean="0"/>
-              <a:t>10/7/2026</a:t>
+              <a:t>10/10/2026</a:t>
             </a:fld>
             <a:endParaRPr lang="en-US"/>
           </a:p>
@@ -4622,7 +4627,7 @@
           <a:p>
             <a:fld id="{2452FF62-8110-4E5B-9444-FF52BEC43877}" type="datetimeFigureOut">
               <a:rPr lang="en-US" smtClean="0"/>
-              <a:t>10/7/2026</a:t>
+              <a:t>10/10/2026</a:t>
             </a:fld>
             <a:endParaRPr lang="en-US"/>
           </a:p>
@@ -4869,7 +4874,7 @@
           <a:p>
             <a:fld id="{2452FF62-8110-4E5B-9444-FF52BEC43877}" type="datetimeFigureOut">
               <a:rPr lang="en-US" smtClean="0"/>
-              <a:t>10/7/2026</a:t>
+              <a:t>10/10/2026</a:t>
             </a:fld>
             <a:endParaRPr lang="en-US"/>
           </a:p>
@@ -5381,6 +5386,557 @@
 </p:sld>
 </file>
 
+<file path=ppt/slides/slide10.xml><?xml version="1.0" encoding="utf-8"?>
+<p:sld xmlns:a="http://schemas.openxmlformats.org/drawingml/2006/main" xmlns:r="http://schemas.openxmlformats.org/officeDocument/2006/relationships" xmlns:p="http://schemas.openxmlformats.org/presentationml/2006/main">
+  <p:cSld>
+    <p:spTree>
+      <p:nvGrpSpPr>
+        <p:cNvPr id="1" name=""/>
+        <p:cNvGrpSpPr/>
+        <p:nvPr/>
+      </p:nvGrpSpPr>
+      <p:grpSpPr>
+        <a:xfrm>
+          <a:off x="0" y="0"/>
+          <a:ext cx="0" cy="0"/>
+          <a:chOff x="0" y="0"/>
+          <a:chExt cx="0" cy="0"/>
+        </a:xfrm>
+      </p:grpSpPr>
+      <p:sp>
+        <p:nvSpPr>
+          <p:cNvPr id="2" name="Title 1">
+            <a:extLst>
+              <a:ext uri="{FF2B5EF4-FFF2-40B4-BE49-F238E27FC236}">
+                <a16:creationId xmlns:a16="http://schemas.microsoft.com/office/drawing/2014/main" id="{F1473A0E-BE05-A039-7211-54C94E1F19D2}"/>
+              </a:ext>
+            </a:extLst>
+          </p:cNvPr>
+          <p:cNvSpPr>
+            <a:spLocks noGrp="1"/>
+          </p:cNvSpPr>
+          <p:nvPr>
+            <p:ph type="title"/>
+          </p:nvPr>
+        </p:nvSpPr>
+        <p:spPr/>
+        <p:txBody>
+          <a:bodyPr/>
+          <a:lstStyle/>
+          <a:p>
+            <a:r>
+              <a:rPr lang="fr-FR" dirty="0"/>
+              <a:t>Comparaison </a:t>
+            </a:r>
+            <a:r>
+              <a:rPr lang="fr-FR" dirty="0" err="1"/>
+              <a:t>EEGpal</a:t>
+            </a:r>
+            <a:r>
+              <a:rPr lang="fr-FR" dirty="0"/>
+              <a:t> </a:t>
+            </a:r>
+            <a:r>
+              <a:rPr lang="fr-FR" dirty="0" err="1"/>
+              <a:t>processing</a:t>
+            </a:r>
+            <a:r>
+              <a:rPr lang="fr-FR" dirty="0"/>
+              <a:t> </a:t>
+            </a:r>
+            <a:r>
+              <a:rPr lang="fr-FR" dirty="0" err="1"/>
+              <a:t>between</a:t>
+            </a:r>
+            <a:r>
+              <a:rPr lang="fr-FR" dirty="0"/>
+              <a:t> submission1 et submission2 sur Peak </a:t>
+            </a:r>
+            <a:r>
+              <a:rPr lang="fr-FR" dirty="0" err="1"/>
+              <a:t>detection</a:t>
+            </a:r>
+            <a:endParaRPr lang="LID4096" dirty="0"/>
+          </a:p>
+        </p:txBody>
+      </p:sp>
+      <p:sp>
+        <p:nvSpPr>
+          <p:cNvPr id="4" name="TextBox 3">
+            <a:extLst>
+              <a:ext uri="{FF2B5EF4-FFF2-40B4-BE49-F238E27FC236}">
+                <a16:creationId xmlns:a16="http://schemas.microsoft.com/office/drawing/2014/main" id="{72670171-1E25-A9AB-AD53-1E04FA8FA3A0}"/>
+              </a:ext>
+            </a:extLst>
+          </p:cNvPr>
+          <p:cNvSpPr txBox="1"/>
+          <p:nvPr/>
+        </p:nvSpPr>
+        <p:spPr>
+          <a:xfrm>
+            <a:off x="432079" y="1336431"/>
+            <a:ext cx="11193864" cy="369332"/>
+          </a:xfrm>
+          <a:prstGeom prst="rect">
+            <a:avLst/>
+          </a:prstGeom>
+          <a:noFill/>
+        </p:spPr>
+        <p:txBody>
+          <a:bodyPr wrap="square" rtlCol="0">
+            <a:spAutoFit/>
+          </a:bodyPr>
+          <a:lstStyle/>
+          <a:p>
+            <a:r>
+              <a:rPr lang="fr-FR" dirty="0" err="1"/>
+              <a:t>Detection</a:t>
+            </a:r>
+            <a:r>
+              <a:rPr lang="fr-FR" dirty="0"/>
+              <a:t> automatique du </a:t>
+            </a:r>
+            <a:r>
+              <a:rPr lang="fr-FR" dirty="0" err="1"/>
+              <a:t>peak</a:t>
+            </a:r>
+            <a:r>
+              <a:rPr lang="fr-FR" dirty="0"/>
+              <a:t> entre 85 et 175 ms </a:t>
+            </a:r>
+            <a:endParaRPr lang="LID4096" dirty="0"/>
+          </a:p>
+        </p:txBody>
+      </p:sp>
+      <p:pic>
+        <p:nvPicPr>
+          <p:cNvPr id="6" name="Picture 5">
+            <a:extLst>
+              <a:ext uri="{FF2B5EF4-FFF2-40B4-BE49-F238E27FC236}">
+                <a16:creationId xmlns:a16="http://schemas.microsoft.com/office/drawing/2014/main" id="{224763AF-80EB-0D62-3439-EC833C3F66E8}"/>
+              </a:ext>
+            </a:extLst>
+          </p:cNvPr>
+          <p:cNvPicPr>
+            <a:picLocks noChangeAspect="1"/>
+          </p:cNvPicPr>
+          <p:nvPr/>
+        </p:nvPicPr>
+        <p:blipFill>
+          <a:blip r:embed="rId2"/>
+          <a:stretch>
+            <a:fillRect/>
+          </a:stretch>
+        </p:blipFill>
+        <p:spPr>
+          <a:xfrm>
+            <a:off x="2301516" y="1872985"/>
+            <a:ext cx="5639587" cy="3648584"/>
+          </a:xfrm>
+          <a:prstGeom prst="rect">
+            <a:avLst/>
+          </a:prstGeom>
+        </p:spPr>
+      </p:pic>
+      <p:sp>
+        <p:nvSpPr>
+          <p:cNvPr id="7" name="TextBox 6">
+            <a:extLst>
+              <a:ext uri="{FF2B5EF4-FFF2-40B4-BE49-F238E27FC236}">
+                <a16:creationId xmlns:a16="http://schemas.microsoft.com/office/drawing/2014/main" id="{7A7E323E-18B2-1434-7E2B-A56B2CB456D4}"/>
+              </a:ext>
+            </a:extLst>
+          </p:cNvPr>
+          <p:cNvSpPr txBox="1"/>
+          <p:nvPr/>
+        </p:nvSpPr>
+        <p:spPr>
+          <a:xfrm>
+            <a:off x="1175657" y="2813540"/>
+            <a:ext cx="1218603" cy="369332"/>
+          </a:xfrm>
+          <a:prstGeom prst="rect">
+            <a:avLst/>
+          </a:prstGeom>
+          <a:noFill/>
+        </p:spPr>
+        <p:txBody>
+          <a:bodyPr wrap="none" rtlCol="0">
+            <a:spAutoFit/>
+          </a:bodyPr>
+          <a:lstStyle/>
+          <a:p>
+            <a:r>
+              <a:rPr lang="fr-FR" dirty="0"/>
+              <a:t>Amplitude </a:t>
+            </a:r>
+            <a:endParaRPr lang="LID4096" dirty="0"/>
+          </a:p>
+        </p:txBody>
+      </p:sp>
+      <p:sp>
+        <p:nvSpPr>
+          <p:cNvPr id="8" name="TextBox 7">
+            <a:extLst>
+              <a:ext uri="{FF2B5EF4-FFF2-40B4-BE49-F238E27FC236}">
+                <a16:creationId xmlns:a16="http://schemas.microsoft.com/office/drawing/2014/main" id="{917FD675-3737-128A-BF1A-C239FC6E6287}"/>
+              </a:ext>
+            </a:extLst>
+          </p:cNvPr>
+          <p:cNvSpPr txBox="1"/>
+          <p:nvPr/>
+        </p:nvSpPr>
+        <p:spPr>
+          <a:xfrm>
+            <a:off x="1470417" y="3059668"/>
+            <a:ext cx="923843" cy="369332"/>
+          </a:xfrm>
+          <a:prstGeom prst="rect">
+            <a:avLst/>
+          </a:prstGeom>
+          <a:noFill/>
+        </p:spPr>
+        <p:txBody>
+          <a:bodyPr wrap="none" rtlCol="0">
+            <a:spAutoFit/>
+          </a:bodyPr>
+          <a:lstStyle/>
+          <a:p>
+            <a:r>
+              <a:rPr lang="fr-FR" dirty="0"/>
+              <a:t>latence </a:t>
+            </a:r>
+            <a:endParaRPr lang="LID4096" dirty="0"/>
+          </a:p>
+        </p:txBody>
+      </p:sp>
+      <p:sp>
+        <p:nvSpPr>
+          <p:cNvPr id="10" name="TextBox 9">
+            <a:extLst>
+              <a:ext uri="{FF2B5EF4-FFF2-40B4-BE49-F238E27FC236}">
+                <a16:creationId xmlns:a16="http://schemas.microsoft.com/office/drawing/2014/main" id="{5FA2A8CF-1A00-7050-148F-6C41E1324591}"/>
+              </a:ext>
+            </a:extLst>
+          </p:cNvPr>
+          <p:cNvSpPr txBox="1"/>
+          <p:nvPr/>
+        </p:nvSpPr>
+        <p:spPr>
+          <a:xfrm>
+            <a:off x="94305" y="4360956"/>
+            <a:ext cx="2435282" cy="369332"/>
+          </a:xfrm>
+          <a:prstGeom prst="rect">
+            <a:avLst/>
+          </a:prstGeom>
+          <a:noFill/>
+        </p:spPr>
+        <p:txBody>
+          <a:bodyPr wrap="none" rtlCol="0">
+            <a:spAutoFit/>
+          </a:bodyPr>
+          <a:lstStyle/>
+          <a:p>
+            <a:r>
+              <a:rPr lang="fr-FR" dirty="0"/>
+              <a:t>Amplitude submission1 </a:t>
+            </a:r>
+            <a:endParaRPr lang="LID4096" dirty="0"/>
+          </a:p>
+        </p:txBody>
+      </p:sp>
+      <p:sp>
+        <p:nvSpPr>
+          <p:cNvPr id="11" name="TextBox 10">
+            <a:extLst>
+              <a:ext uri="{FF2B5EF4-FFF2-40B4-BE49-F238E27FC236}">
+                <a16:creationId xmlns:a16="http://schemas.microsoft.com/office/drawing/2014/main" id="{882B7F6E-F0D2-0EBA-1E0B-81FA392B1FF6}"/>
+              </a:ext>
+            </a:extLst>
+          </p:cNvPr>
+          <p:cNvSpPr txBox="1"/>
+          <p:nvPr/>
+        </p:nvSpPr>
+        <p:spPr>
+          <a:xfrm>
+            <a:off x="94305" y="4897510"/>
+            <a:ext cx="2435282" cy="369332"/>
+          </a:xfrm>
+          <a:prstGeom prst="rect">
+            <a:avLst/>
+          </a:prstGeom>
+          <a:noFill/>
+        </p:spPr>
+        <p:txBody>
+          <a:bodyPr wrap="none" rtlCol="0">
+            <a:spAutoFit/>
+          </a:bodyPr>
+          <a:lstStyle/>
+          <a:p>
+            <a:r>
+              <a:rPr lang="fr-FR" dirty="0"/>
+              <a:t>Amplitude submission2 </a:t>
+            </a:r>
+            <a:endParaRPr lang="LID4096" dirty="0"/>
+          </a:p>
+        </p:txBody>
+      </p:sp>
+      <p:sp>
+        <p:nvSpPr>
+          <p:cNvPr id="12" name="TextBox 11">
+            <a:extLst>
+              <a:ext uri="{FF2B5EF4-FFF2-40B4-BE49-F238E27FC236}">
+                <a16:creationId xmlns:a16="http://schemas.microsoft.com/office/drawing/2014/main" id="{90C12E0E-690B-C8B3-D58D-875160254DB1}"/>
+              </a:ext>
+            </a:extLst>
+          </p:cNvPr>
+          <p:cNvSpPr txBox="1"/>
+          <p:nvPr/>
+        </p:nvSpPr>
+        <p:spPr>
+          <a:xfrm>
+            <a:off x="344181" y="5184419"/>
+            <a:ext cx="2185406" cy="369332"/>
+          </a:xfrm>
+          <a:prstGeom prst="rect">
+            <a:avLst/>
+          </a:prstGeom>
+          <a:noFill/>
+        </p:spPr>
+        <p:txBody>
+          <a:bodyPr wrap="none" rtlCol="0">
+            <a:spAutoFit/>
+          </a:bodyPr>
+          <a:lstStyle/>
+          <a:p>
+            <a:r>
+              <a:rPr lang="fr-FR" dirty="0"/>
+              <a:t>Latence submission2 </a:t>
+            </a:r>
+            <a:endParaRPr lang="LID4096" dirty="0"/>
+          </a:p>
+        </p:txBody>
+      </p:sp>
+      <p:sp>
+        <p:nvSpPr>
+          <p:cNvPr id="14" name="TextBox 13">
+            <a:extLst>
+              <a:ext uri="{FF2B5EF4-FFF2-40B4-BE49-F238E27FC236}">
+                <a16:creationId xmlns:a16="http://schemas.microsoft.com/office/drawing/2014/main" id="{B60E6E99-EE65-4880-1EF4-F7908B4A3DB0}"/>
+              </a:ext>
+            </a:extLst>
+          </p:cNvPr>
+          <p:cNvSpPr txBox="1"/>
+          <p:nvPr/>
+        </p:nvSpPr>
+        <p:spPr>
+          <a:xfrm>
+            <a:off x="344181" y="4629233"/>
+            <a:ext cx="2185406" cy="369332"/>
+          </a:xfrm>
+          <a:prstGeom prst="rect">
+            <a:avLst/>
+          </a:prstGeom>
+          <a:noFill/>
+        </p:spPr>
+        <p:txBody>
+          <a:bodyPr wrap="none" rtlCol="0">
+            <a:spAutoFit/>
+          </a:bodyPr>
+          <a:lstStyle/>
+          <a:p>
+            <a:r>
+              <a:rPr lang="fr-FR" dirty="0"/>
+              <a:t>Latence submission1 </a:t>
+            </a:r>
+            <a:endParaRPr lang="LID4096" dirty="0"/>
+          </a:p>
+        </p:txBody>
+      </p:sp>
+      <p:sp>
+        <p:nvSpPr>
+          <p:cNvPr id="15" name="TextBox 14">
+            <a:extLst>
+              <a:ext uri="{FF2B5EF4-FFF2-40B4-BE49-F238E27FC236}">
+                <a16:creationId xmlns:a16="http://schemas.microsoft.com/office/drawing/2014/main" id="{A5ED4988-F0CC-FBFB-3BD1-FA466E7B38C2}"/>
+              </a:ext>
+            </a:extLst>
+          </p:cNvPr>
+          <p:cNvSpPr txBox="1"/>
+          <p:nvPr/>
+        </p:nvSpPr>
+        <p:spPr>
+          <a:xfrm>
+            <a:off x="2984360" y="5767754"/>
+            <a:ext cx="2399824" cy="369332"/>
+          </a:xfrm>
+          <a:prstGeom prst="rect">
+            <a:avLst/>
+          </a:prstGeom>
+          <a:noFill/>
+        </p:spPr>
+        <p:txBody>
+          <a:bodyPr wrap="none" rtlCol="0">
+            <a:spAutoFit/>
+          </a:bodyPr>
+          <a:lstStyle/>
+          <a:p>
+            <a:r>
+              <a:rPr lang="fr-FR" b="1" dirty="0">
+                <a:solidFill>
+                  <a:srgbClr val="FF0000"/>
+                </a:solidFill>
+              </a:rPr>
+              <a:t>Il y a aucune différence</a:t>
+            </a:r>
+            <a:endParaRPr lang="LID4096" b="1" dirty="0">
+              <a:solidFill>
+                <a:srgbClr val="FF0000"/>
+              </a:solidFill>
+            </a:endParaRPr>
+          </a:p>
+        </p:txBody>
+      </p:sp>
+    </p:spTree>
+    <p:extLst>
+      <p:ext uri="{BB962C8B-B14F-4D97-AF65-F5344CB8AC3E}">
+        <p14:creationId xmlns:p14="http://schemas.microsoft.com/office/powerpoint/2010/main" val="2826547843"/>
+      </p:ext>
+    </p:extLst>
+  </p:cSld>
+  <p:clrMapOvr>
+    <a:masterClrMapping/>
+  </p:clrMapOvr>
+</p:sld>
+</file>
+
+<file path=ppt/slides/slide11.xml><?xml version="1.0" encoding="utf-8"?>
+<p:sld xmlns:a="http://schemas.openxmlformats.org/drawingml/2006/main" xmlns:r="http://schemas.openxmlformats.org/officeDocument/2006/relationships" xmlns:p="http://schemas.openxmlformats.org/presentationml/2006/main">
+  <p:cSld>
+    <p:spTree>
+      <p:nvGrpSpPr>
+        <p:cNvPr id="1" name=""/>
+        <p:cNvGrpSpPr/>
+        <p:nvPr/>
+      </p:nvGrpSpPr>
+      <p:grpSpPr>
+        <a:xfrm>
+          <a:off x="0" y="0"/>
+          <a:ext cx="0" cy="0"/>
+          <a:chOff x="0" y="0"/>
+          <a:chExt cx="0" cy="0"/>
+        </a:xfrm>
+      </p:grpSpPr>
+      <p:sp>
+        <p:nvSpPr>
+          <p:cNvPr id="2" name="Title 1">
+            <a:extLst>
+              <a:ext uri="{FF2B5EF4-FFF2-40B4-BE49-F238E27FC236}">
+                <a16:creationId xmlns:a16="http://schemas.microsoft.com/office/drawing/2014/main" id="{72B384D3-7BC4-465F-70AD-5E0BE00861D8}"/>
+              </a:ext>
+            </a:extLst>
+          </p:cNvPr>
+          <p:cNvSpPr>
+            <a:spLocks noGrp="1"/>
+          </p:cNvSpPr>
+          <p:nvPr>
+            <p:ph type="title"/>
+          </p:nvPr>
+        </p:nvSpPr>
+        <p:spPr/>
+        <p:txBody>
+          <a:bodyPr/>
+          <a:lstStyle/>
+          <a:p>
+            <a:r>
+              <a:rPr lang="fr-FR" dirty="0"/>
+              <a:t>Conclusion</a:t>
+            </a:r>
+            <a:endParaRPr lang="LID4096" dirty="0"/>
+          </a:p>
+        </p:txBody>
+      </p:sp>
+      <p:sp>
+        <p:nvSpPr>
+          <p:cNvPr id="3" name="Content Placeholder 2">
+            <a:extLst>
+              <a:ext uri="{FF2B5EF4-FFF2-40B4-BE49-F238E27FC236}">
+                <a16:creationId xmlns:a16="http://schemas.microsoft.com/office/drawing/2014/main" id="{4A19ED2B-5E13-E62F-AF82-5DD57B34BBA3}"/>
+              </a:ext>
+            </a:extLst>
+          </p:cNvPr>
+          <p:cNvSpPr>
+            <a:spLocks noGrp="1"/>
+          </p:cNvSpPr>
+          <p:nvPr>
+            <p:ph idx="1"/>
+          </p:nvPr>
+        </p:nvSpPr>
+        <p:spPr/>
+        <p:txBody>
+          <a:bodyPr/>
+          <a:lstStyle/>
+          <a:p>
+            <a:pPr marL="457200" indent="-457200">
+              <a:buFont typeface="+mj-lt"/>
+              <a:buAutoNum type="arabicPeriod"/>
+            </a:pPr>
+            <a:r>
+              <a:rPr lang="fr-FR" dirty="0"/>
+              <a:t>Modification du </a:t>
+            </a:r>
+            <a:r>
+              <a:rPr lang="fr-FR" dirty="0" err="1"/>
+              <a:t>processing</a:t>
+            </a:r>
+            <a:r>
+              <a:rPr lang="fr-FR" dirty="0"/>
+              <a:t> proposé par le </a:t>
+            </a:r>
+            <a:r>
+              <a:rPr lang="fr-FR" dirty="0" err="1"/>
+              <a:t>reviewer</a:t>
+            </a:r>
+            <a:r>
+              <a:rPr lang="fr-FR" dirty="0"/>
+              <a:t> 2 ne change absolument rien</a:t>
+            </a:r>
+          </a:p>
+          <a:p>
+            <a:pPr marL="457200" indent="-457200">
+              <a:buFont typeface="+mj-lt"/>
+              <a:buAutoNum type="arabicPeriod"/>
+            </a:pPr>
+            <a:r>
+              <a:rPr lang="fr-FR" dirty="0" err="1"/>
+              <a:t>EEGpal</a:t>
+            </a:r>
+            <a:r>
+              <a:rPr lang="fr-FR" dirty="0"/>
+              <a:t> 2.2 </a:t>
+            </a:r>
+            <a:r>
+              <a:rPr lang="fr-FR"/>
+              <a:t>est validé</a:t>
+            </a:r>
+            <a:endParaRPr lang="LID4096"/>
+          </a:p>
+        </p:txBody>
+      </p:sp>
+    </p:spTree>
+    <p:extLst>
+      <p:ext uri="{BB962C8B-B14F-4D97-AF65-F5344CB8AC3E}">
+        <p14:creationId xmlns:p14="http://schemas.microsoft.com/office/powerpoint/2010/main" val="2066898386"/>
+      </p:ext>
+    </p:extLst>
+  </p:cSld>
+  <p:clrMapOvr>
+    <a:masterClrMapping/>
+  </p:clrMapOvr>
+</p:sld>
+</file>
+
 <file path=ppt/slides/slide2.xml><?xml version="1.0" encoding="utf-8"?>
 <p:sld xmlns:a="http://schemas.openxmlformats.org/drawingml/2006/main" xmlns:r="http://schemas.openxmlformats.org/officeDocument/2006/relationships" xmlns:p="http://schemas.openxmlformats.org/presentationml/2006/main">
   <p:cSld>
@@ -5449,21 +6005,32 @@
           </a:bodyPr>
           <a:lstStyle/>
           <a:p>
+            <a:pPr marL="0" indent="0">
+              <a:buNone/>
+            </a:pPr>
+            <a:r>
+              <a:rPr lang="en-US" dirty="0"/>
+              <a:t>The version 2.2 bring serval changes since version 2.0 (see release note). The last modification to test: </a:t>
+            </a:r>
+          </a:p>
+          <a:p>
             <a:pPr>
               <a:buFontTx/>
               <a:buChar char="-"/>
             </a:pPr>
             <a:r>
               <a:rPr lang="en-US" dirty="0"/>
-              <a:t>Upgrade to </a:t>
-            </a:r>
-            <a:r>
-              <a:rPr lang="en-US" dirty="0" err="1"/>
-              <a:t>eeglab</a:t>
-            </a:r>
+              <a:t>Permit to use the Reref twice in a batch (at the beginning and at the end)</a:t>
+            </a:r>
+          </a:p>
+          <a:p>
+            <a:pPr>
+              <a:buFontTx/>
+              <a:buChar char="-"/>
+            </a:pPr>
             <a:r>
               <a:rPr lang="en-US" dirty="0"/>
-              <a:t> 2026.1</a:t>
+              <a:t>Upgrade to EEGLAB 2026.1</a:t>
             </a:r>
           </a:p>
           <a:p>
@@ -6809,6 +7376,875 @@
     <p:extLst>
       <p:ext uri="{BB962C8B-B14F-4D97-AF65-F5344CB8AC3E}">
         <p14:creationId xmlns:p14="http://schemas.microsoft.com/office/powerpoint/2010/main" val="3786020379"/>
+      </p:ext>
+    </p:extLst>
+  </p:cSld>
+  <p:clrMapOvr>
+    <a:masterClrMapping/>
+  </p:clrMapOvr>
+</p:sld>
+</file>
+
+<file path=ppt/slides/slide7.xml><?xml version="1.0" encoding="utf-8"?>
+<p:sld xmlns:a="http://schemas.openxmlformats.org/drawingml/2006/main" xmlns:r="http://schemas.openxmlformats.org/officeDocument/2006/relationships" xmlns:p="http://schemas.openxmlformats.org/presentationml/2006/main">
+  <p:cSld>
+    <p:spTree>
+      <p:nvGrpSpPr>
+        <p:cNvPr id="1" name=""/>
+        <p:cNvGrpSpPr/>
+        <p:nvPr/>
+      </p:nvGrpSpPr>
+      <p:grpSpPr>
+        <a:xfrm>
+          <a:off x="0" y="0"/>
+          <a:ext cx="0" cy="0"/>
+          <a:chOff x="0" y="0"/>
+          <a:chExt cx="0" cy="0"/>
+        </a:xfrm>
+      </p:grpSpPr>
+      <p:sp>
+        <p:nvSpPr>
+          <p:cNvPr id="2" name="Title 1">
+            <a:extLst>
+              <a:ext uri="{FF2B5EF4-FFF2-40B4-BE49-F238E27FC236}">
+                <a16:creationId xmlns:a16="http://schemas.microsoft.com/office/drawing/2014/main" id="{02D15B9E-96D8-E1E6-1BBB-EA4C93DAF88D}"/>
+              </a:ext>
+            </a:extLst>
+          </p:cNvPr>
+          <p:cNvSpPr>
+            <a:spLocks noGrp="1"/>
+          </p:cNvSpPr>
+          <p:nvPr>
+            <p:ph type="ctrTitle"/>
+          </p:nvPr>
+        </p:nvSpPr>
+        <p:spPr>
+          <a:xfrm>
+            <a:off x="1524000" y="2186854"/>
+            <a:ext cx="9144000" cy="1242146"/>
+          </a:xfrm>
+        </p:spPr>
+        <p:txBody>
+          <a:bodyPr/>
+          <a:lstStyle/>
+          <a:p>
+            <a:r>
+              <a:rPr lang="en-US" sz="4800" dirty="0"/>
+              <a:t>Validation 2 de </a:t>
+            </a:r>
+            <a:r>
+              <a:rPr lang="en-US" sz="4800" dirty="0" err="1"/>
+              <a:t>EEGpal</a:t>
+            </a:r>
+            <a:r>
+              <a:rPr lang="en-US" sz="4800" dirty="0"/>
+              <a:t> v2.2</a:t>
+            </a:r>
+            <a:br>
+              <a:rPr lang="en-US" sz="4800" dirty="0"/>
+            </a:br>
+            <a:r>
+              <a:rPr lang="en-US" sz="4800" dirty="0"/>
+              <a:t>Nouveau processing des data de </a:t>
+            </a:r>
+            <a:r>
+              <a:rPr lang="en-US" sz="4800" dirty="0" err="1"/>
+              <a:t>ERPcore</a:t>
+            </a:r>
+            <a:r>
+              <a:rPr lang="en-US" sz="4800" dirty="0"/>
+              <a:t> (N170) pour après review de la </a:t>
+            </a:r>
+            <a:r>
+              <a:rPr lang="en-US" sz="4800" dirty="0" err="1"/>
+              <a:t>permière</a:t>
+            </a:r>
+            <a:r>
+              <a:rPr lang="en-US" sz="4800" dirty="0"/>
+              <a:t> version de </a:t>
+            </a:r>
+            <a:r>
+              <a:rPr lang="en-US" sz="4800" dirty="0" err="1"/>
+              <a:t>l’article</a:t>
+            </a:r>
+            <a:endParaRPr lang="en-US" sz="4800" dirty="0"/>
+          </a:p>
+        </p:txBody>
+      </p:sp>
+      <p:sp>
+        <p:nvSpPr>
+          <p:cNvPr id="3" name="Subtitle 2">
+            <a:extLst>
+              <a:ext uri="{FF2B5EF4-FFF2-40B4-BE49-F238E27FC236}">
+                <a16:creationId xmlns:a16="http://schemas.microsoft.com/office/drawing/2014/main" id="{76F0F9E9-167D-C51A-C605-2D714D13D3CA}"/>
+              </a:ext>
+            </a:extLst>
+          </p:cNvPr>
+          <p:cNvSpPr>
+            <a:spLocks noGrp="1"/>
+          </p:cNvSpPr>
+          <p:nvPr>
+            <p:ph type="subTitle" idx="1"/>
+          </p:nvPr>
+        </p:nvSpPr>
+        <p:spPr>
+          <a:xfrm>
+            <a:off x="1413468" y="4938469"/>
+            <a:ext cx="9144000" cy="564609"/>
+          </a:xfrm>
+        </p:spPr>
+        <p:txBody>
+          <a:bodyPr>
+            <a:normAutofit fontScale="62500" lnSpcReduction="20000"/>
+          </a:bodyPr>
+          <a:lstStyle/>
+          <a:p>
+            <a:r>
+              <a:rPr lang="en-US" dirty="0"/>
+              <a:t>Michaël Mouthon</a:t>
+            </a:r>
+          </a:p>
+          <a:p>
+            <a:r>
+              <a:rPr lang="en-US" dirty="0"/>
+              <a:t>27.09.2026</a:t>
+            </a:r>
+          </a:p>
+        </p:txBody>
+      </p:sp>
+    </p:spTree>
+    <p:extLst>
+      <p:ext uri="{BB962C8B-B14F-4D97-AF65-F5344CB8AC3E}">
+        <p14:creationId xmlns:p14="http://schemas.microsoft.com/office/powerpoint/2010/main" val="211341214"/>
+      </p:ext>
+    </p:extLst>
+  </p:cSld>
+  <p:clrMapOvr>
+    <a:masterClrMapping/>
+  </p:clrMapOvr>
+</p:sld>
+</file>
+
+<file path=ppt/slides/slide8.xml><?xml version="1.0" encoding="utf-8"?>
+<p:sld xmlns:a="http://schemas.openxmlformats.org/drawingml/2006/main" xmlns:r="http://schemas.openxmlformats.org/officeDocument/2006/relationships" xmlns:p="http://schemas.openxmlformats.org/presentationml/2006/main">
+  <p:cSld>
+    <p:spTree>
+      <p:nvGrpSpPr>
+        <p:cNvPr id="1" name=""/>
+        <p:cNvGrpSpPr/>
+        <p:nvPr/>
+      </p:nvGrpSpPr>
+      <p:grpSpPr>
+        <a:xfrm>
+          <a:off x="0" y="0"/>
+          <a:ext cx="0" cy="0"/>
+          <a:chOff x="0" y="0"/>
+          <a:chExt cx="0" cy="0"/>
+        </a:xfrm>
+      </p:grpSpPr>
+      <p:sp>
+        <p:nvSpPr>
+          <p:cNvPr id="2" name="Title 1">
+            <a:extLst>
+              <a:ext uri="{FF2B5EF4-FFF2-40B4-BE49-F238E27FC236}">
+                <a16:creationId xmlns:a16="http://schemas.microsoft.com/office/drawing/2014/main" id="{E6937797-EDA5-9793-5F6A-BBA4F0EE98EC}"/>
+              </a:ext>
+            </a:extLst>
+          </p:cNvPr>
+          <p:cNvSpPr>
+            <a:spLocks noGrp="1"/>
+          </p:cNvSpPr>
+          <p:nvPr>
+            <p:ph type="title"/>
+          </p:nvPr>
+        </p:nvSpPr>
+        <p:spPr>
+          <a:xfrm>
+            <a:off x="838200" y="197750"/>
+            <a:ext cx="10515600" cy="483287"/>
+          </a:xfrm>
+        </p:spPr>
+        <p:txBody>
+          <a:bodyPr/>
+          <a:lstStyle/>
+          <a:p>
+            <a:r>
+              <a:rPr lang="fr-FR" sz="3200" dirty="0"/>
+              <a:t>Redo </a:t>
+            </a:r>
+            <a:r>
+              <a:rPr lang="fr-FR" sz="3200" dirty="0" err="1"/>
+              <a:t>processing</a:t>
+            </a:r>
+            <a:r>
+              <a:rPr lang="fr-FR" sz="3200" dirty="0"/>
+              <a:t> to compare </a:t>
+            </a:r>
+            <a:r>
+              <a:rPr lang="fr-FR" sz="3200" dirty="0" err="1"/>
+              <a:t>with</a:t>
+            </a:r>
+            <a:r>
+              <a:rPr lang="fr-FR" sz="3200" dirty="0"/>
+              <a:t> </a:t>
+            </a:r>
+            <a:r>
+              <a:rPr lang="fr-FR" sz="3200" dirty="0" err="1"/>
+              <a:t>Kappermann</a:t>
+            </a:r>
+            <a:r>
+              <a:rPr lang="fr-FR" sz="3200" dirty="0"/>
+              <a:t> (en rouge les nouveauté)</a:t>
+            </a:r>
+            <a:endParaRPr lang="fr-CH" sz="3200" dirty="0"/>
+          </a:p>
+        </p:txBody>
+      </p:sp>
+      <p:sp>
+        <p:nvSpPr>
+          <p:cNvPr id="3" name="Content Placeholder 2">
+            <a:extLst>
+              <a:ext uri="{FF2B5EF4-FFF2-40B4-BE49-F238E27FC236}">
+                <a16:creationId xmlns:a16="http://schemas.microsoft.com/office/drawing/2014/main" id="{12E7EF46-B634-510E-204E-B9638EA0BEA9}"/>
+              </a:ext>
+            </a:extLst>
+          </p:cNvPr>
+          <p:cNvSpPr>
+            <a:spLocks noGrp="1"/>
+          </p:cNvSpPr>
+          <p:nvPr>
+            <p:ph idx="1"/>
+          </p:nvPr>
+        </p:nvSpPr>
+        <p:spPr/>
+        <p:txBody>
+          <a:bodyPr>
+            <a:normAutofit fontScale="92500" lnSpcReduction="10000"/>
+          </a:bodyPr>
+          <a:lstStyle/>
+          <a:p>
+            <a:r>
+              <a:rPr lang="fr-FR" dirty="0" err="1">
+                <a:solidFill>
+                  <a:srgbClr val="FF0000"/>
+                </a:solidFill>
+              </a:rPr>
+              <a:t>Reref</a:t>
+            </a:r>
+            <a:r>
+              <a:rPr lang="fr-FR" dirty="0">
+                <a:solidFill>
+                  <a:srgbClr val="FF0000"/>
+                </a:solidFill>
+              </a:rPr>
+              <a:t> sur </a:t>
+            </a:r>
+            <a:r>
+              <a:rPr lang="fr-FR" dirty="0" err="1">
+                <a:solidFill>
+                  <a:srgbClr val="FF0000"/>
+                </a:solidFill>
+              </a:rPr>
+              <a:t>average</a:t>
+            </a:r>
+            <a:r>
+              <a:rPr lang="fr-FR" dirty="0">
+                <a:solidFill>
+                  <a:srgbClr val="FF0000"/>
+                </a:solidFill>
+              </a:rPr>
+              <a:t> des électrodes P9 et P10</a:t>
+            </a:r>
+          </a:p>
+          <a:p>
+            <a:r>
+              <a:rPr lang="fr-FR" dirty="0" err="1"/>
+              <a:t>Filtering</a:t>
+            </a:r>
+            <a:r>
+              <a:rPr lang="fr-FR" dirty="0"/>
+              <a:t> + : </a:t>
+            </a:r>
+            <a:r>
+              <a:rPr lang="fr-FR" dirty="0" err="1"/>
+              <a:t>eeglab</a:t>
+            </a:r>
+            <a:r>
+              <a:rPr lang="fr-FR" dirty="0"/>
+              <a:t> </a:t>
+            </a:r>
+            <a:r>
+              <a:rPr lang="fr-FR" dirty="0" err="1"/>
+              <a:t>filter</a:t>
+            </a:r>
+            <a:r>
+              <a:rPr lang="fr-FR" dirty="0"/>
+              <a:t> </a:t>
+            </a:r>
+            <a:r>
+              <a:rPr lang="fr-FR" dirty="0" err="1"/>
+              <a:t>from</a:t>
+            </a:r>
+            <a:r>
+              <a:rPr lang="fr-FR" dirty="0"/>
+              <a:t> 0.1Hz avec </a:t>
+            </a:r>
+            <a:r>
+              <a:rPr lang="fr-FR" dirty="0" err="1"/>
+              <a:t>downoad</a:t>
+            </a:r>
+            <a:r>
+              <a:rPr lang="fr-FR" dirty="0"/>
+              <a:t> </a:t>
+            </a:r>
+            <a:r>
+              <a:rPr lang="fr-FR" dirty="0" err="1"/>
+              <a:t>sample</a:t>
+            </a:r>
+            <a:r>
+              <a:rPr lang="fr-FR" dirty="0"/>
+              <a:t> à 256 Hz</a:t>
+            </a:r>
+          </a:p>
+          <a:p>
+            <a:r>
+              <a:rPr lang="fr-FR" dirty="0"/>
+              <a:t>Cut les break </a:t>
+            </a:r>
+            <a:r>
+              <a:rPr lang="fr-FR" dirty="0" err="1"/>
+              <a:t>period</a:t>
+            </a:r>
+            <a:r>
+              <a:rPr lang="fr-FR" dirty="0"/>
+              <a:t> avec </a:t>
+            </a:r>
+            <a:r>
+              <a:rPr lang="fr-FR" dirty="0" err="1"/>
+              <a:t>FileCut</a:t>
+            </a:r>
+            <a:r>
+              <a:rPr lang="fr-FR" dirty="0"/>
+              <a:t>(on peut reprendre les </a:t>
+            </a:r>
+            <a:r>
+              <a:rPr lang="fr-FR" dirty="0" err="1"/>
+              <a:t>mrk</a:t>
+            </a:r>
+            <a:r>
+              <a:rPr lang="fr-FR" dirty="0"/>
+              <a:t> des fichier précédent)</a:t>
+            </a:r>
+          </a:p>
+          <a:p>
+            <a:r>
+              <a:rPr lang="fr-FR" dirty="0"/>
+              <a:t>ICA to </a:t>
+            </a:r>
+            <a:r>
+              <a:rPr lang="fr-FR" dirty="0" err="1"/>
+              <a:t>remove</a:t>
+            </a:r>
+            <a:r>
+              <a:rPr lang="fr-FR" dirty="0"/>
+              <a:t> </a:t>
+            </a:r>
+            <a:r>
+              <a:rPr lang="fr-FR" dirty="0" err="1"/>
+              <a:t>only</a:t>
+            </a:r>
+            <a:r>
+              <a:rPr lang="fr-FR" dirty="0"/>
+              <a:t> </a:t>
+            </a:r>
+            <a:r>
+              <a:rPr lang="fr-FR" dirty="0" err="1"/>
+              <a:t>eye</a:t>
+            </a:r>
+            <a:r>
+              <a:rPr lang="fr-FR" dirty="0"/>
+              <a:t> compounds (</a:t>
+            </a:r>
+            <a:r>
+              <a:rPr lang="fr-FR" dirty="0" err="1"/>
+              <a:t>without</a:t>
+            </a:r>
+            <a:r>
+              <a:rPr lang="fr-FR" dirty="0"/>
+              <a:t> </a:t>
+            </a:r>
+            <a:r>
+              <a:rPr lang="fr-FR" dirty="0" err="1"/>
+              <a:t>ignoring</a:t>
+            </a:r>
+            <a:r>
+              <a:rPr lang="fr-FR" dirty="0"/>
+              <a:t> </a:t>
+            </a:r>
+            <a:r>
+              <a:rPr lang="fr-FR" dirty="0" err="1"/>
+              <a:t>bad</a:t>
+            </a:r>
+            <a:r>
+              <a:rPr lang="fr-FR" dirty="0"/>
+              <a:t> channels)</a:t>
+            </a:r>
+          </a:p>
+          <a:p>
+            <a:r>
+              <a:rPr lang="fr-FR" dirty="0"/>
+              <a:t>Interpolation of the </a:t>
+            </a:r>
+            <a:r>
+              <a:rPr lang="fr-FR" dirty="0" err="1"/>
+              <a:t>same</a:t>
+            </a:r>
+            <a:r>
+              <a:rPr lang="fr-FR" dirty="0"/>
+              <a:t> </a:t>
+            </a:r>
+            <a:r>
+              <a:rPr lang="fr-FR" dirty="0" err="1"/>
+              <a:t>electrodes</a:t>
+            </a:r>
+            <a:r>
+              <a:rPr lang="fr-FR" dirty="0"/>
+              <a:t> as the </a:t>
+            </a:r>
+            <a:r>
+              <a:rPr lang="fr-FR" dirty="0" err="1"/>
+              <a:t>authors</a:t>
+            </a:r>
+            <a:r>
+              <a:rPr lang="fr-FR" dirty="0"/>
+              <a:t> </a:t>
+            </a:r>
+            <a:r>
+              <a:rPr lang="fr-FR" dirty="0" err="1"/>
+              <a:t>suggested</a:t>
+            </a:r>
+            <a:r>
+              <a:rPr lang="fr-FR" dirty="0"/>
+              <a:t> (</a:t>
+            </a:r>
+            <a:r>
+              <a:rPr lang="fr-FR" dirty="0" err="1"/>
+              <a:t>according</a:t>
+            </a:r>
+            <a:r>
+              <a:rPr lang="fr-FR" dirty="0"/>
+              <a:t> to the file </a:t>
+            </a:r>
+            <a:r>
+              <a:rPr lang="nl-NL" dirty="0"/>
+              <a:t>\processing_scripts\EEG_ERP_Processing</a:t>
+            </a:r>
+            <a:r>
+              <a:rPr lang="fr-FR" dirty="0"/>
+              <a:t>\Interpolate_Channels_N170.xlsx</a:t>
+            </a:r>
+          </a:p>
+          <a:p>
+            <a:r>
+              <a:rPr lang="fr-FR" dirty="0" err="1">
+                <a:solidFill>
+                  <a:srgbClr val="FF0000"/>
+                </a:solidFill>
+              </a:rPr>
+              <a:t>Reref</a:t>
+            </a:r>
+            <a:r>
+              <a:rPr lang="fr-FR" dirty="0">
+                <a:solidFill>
+                  <a:srgbClr val="FF0000"/>
+                </a:solidFill>
+              </a:rPr>
+              <a:t> to </a:t>
+            </a:r>
+            <a:r>
+              <a:rPr lang="fr-FR" dirty="0" err="1">
+                <a:solidFill>
+                  <a:srgbClr val="FF0000"/>
+                </a:solidFill>
+              </a:rPr>
+              <a:t>average</a:t>
+            </a:r>
+            <a:r>
+              <a:rPr lang="fr-FR" dirty="0">
+                <a:solidFill>
+                  <a:srgbClr val="FF0000"/>
+                </a:solidFill>
+              </a:rPr>
+              <a:t> </a:t>
+            </a:r>
+            <a:r>
+              <a:rPr lang="fr-FR" dirty="0" err="1">
+                <a:solidFill>
+                  <a:srgbClr val="FF0000"/>
+                </a:solidFill>
+              </a:rPr>
+              <a:t>reference</a:t>
+            </a:r>
+            <a:r>
+              <a:rPr lang="fr-FR" dirty="0">
+                <a:solidFill>
+                  <a:srgbClr val="FF0000"/>
+                </a:solidFill>
+              </a:rPr>
+              <a:t> (ça aucun sens de le faire avant l’interpolation)</a:t>
+            </a:r>
+            <a:endParaRPr lang="fr-FR" dirty="0"/>
+          </a:p>
+          <a:p>
+            <a:r>
+              <a:rPr lang="fr-FR" dirty="0" err="1"/>
+              <a:t>Epoching</a:t>
+            </a:r>
+            <a:r>
+              <a:rPr lang="fr-FR" dirty="0"/>
+              <a:t> -200 to 800ms and shift the trigger of 26ms. </a:t>
+            </a:r>
+            <a:br>
+              <a:rPr lang="fr-FR" dirty="0"/>
+            </a:br>
+            <a:r>
+              <a:rPr lang="fr-FR" dirty="0"/>
+              <a:t>Pre-</a:t>
+            </a:r>
+            <a:r>
+              <a:rPr lang="fr-FR" dirty="0" err="1"/>
+              <a:t>baseline</a:t>
+            </a:r>
+            <a:r>
+              <a:rPr lang="fr-FR" dirty="0"/>
+              <a:t> correction -200 to 0ms</a:t>
+            </a:r>
+            <a:br>
+              <a:rPr lang="fr-FR" dirty="0"/>
+            </a:br>
+            <a:r>
+              <a:rPr lang="fr-FR" dirty="0"/>
+              <a:t>Artefact </a:t>
+            </a:r>
+            <a:r>
+              <a:rPr lang="fr-FR" dirty="0" err="1"/>
+              <a:t>rejaction</a:t>
+            </a:r>
+            <a:r>
+              <a:rPr lang="fr-FR" dirty="0"/>
+              <a:t> Amplitude a 300 </a:t>
+            </a:r>
+            <a:r>
+              <a:rPr lang="fr-FR" dirty="0" err="1"/>
+              <a:t>uV</a:t>
+            </a:r>
+            <a:r>
+              <a:rPr lang="fr-FR" dirty="0"/>
+              <a:t> + jump 50uV</a:t>
+            </a:r>
+          </a:p>
+          <a:p>
+            <a:r>
+              <a:rPr lang="fr-FR" dirty="0"/>
+              <a:t>Filter </a:t>
+            </a:r>
+            <a:r>
+              <a:rPr lang="fr-FR" dirty="0" err="1"/>
+              <a:t>low</a:t>
+            </a:r>
+            <a:r>
+              <a:rPr lang="fr-FR" dirty="0"/>
+              <a:t> </a:t>
+            </a:r>
+            <a:r>
+              <a:rPr lang="fr-FR" dirty="0" err="1"/>
+              <a:t>pass</a:t>
+            </a:r>
+            <a:r>
+              <a:rPr lang="fr-FR" dirty="0"/>
+              <a:t> à 20 Hz (mais c’est pourri de le faire)</a:t>
+            </a:r>
+            <a:br>
+              <a:rPr lang="fr-FR" dirty="0"/>
+            </a:br>
+            <a:endParaRPr lang="fr-FR" dirty="0"/>
+          </a:p>
+          <a:p>
+            <a:r>
+              <a:rPr lang="fr-FR" dirty="0"/>
+              <a:t>ERP1 for trigger 1-40 (face) and ERP2 for trigger 41 -80 (car)</a:t>
+            </a:r>
+            <a:br>
+              <a:rPr lang="fr-FR" dirty="0"/>
+            </a:br>
+            <a:r>
+              <a:rPr lang="fr-FR" dirty="0" err="1"/>
+              <a:t>Substraction</a:t>
+            </a:r>
+            <a:r>
+              <a:rPr lang="fr-FR" dirty="0"/>
+              <a:t> ERP1-ERP2</a:t>
+            </a:r>
+          </a:p>
+          <a:p>
+            <a:endParaRPr lang="fr-FR" dirty="0"/>
+          </a:p>
+          <a:p>
+            <a:endParaRPr lang="fr-CH" dirty="0"/>
+          </a:p>
+        </p:txBody>
+      </p:sp>
+    </p:spTree>
+    <p:extLst>
+      <p:ext uri="{BB962C8B-B14F-4D97-AF65-F5344CB8AC3E}">
+        <p14:creationId xmlns:p14="http://schemas.microsoft.com/office/powerpoint/2010/main" val="713361664"/>
+      </p:ext>
+    </p:extLst>
+  </p:cSld>
+  <p:clrMapOvr>
+    <a:masterClrMapping/>
+  </p:clrMapOvr>
+</p:sld>
+</file>
+
+<file path=ppt/slides/slide9.xml><?xml version="1.0" encoding="utf-8"?>
+<p:sld xmlns:a="http://schemas.openxmlformats.org/drawingml/2006/main" xmlns:r="http://schemas.openxmlformats.org/officeDocument/2006/relationships" xmlns:p="http://schemas.openxmlformats.org/presentationml/2006/main">
+  <p:cSld>
+    <p:spTree>
+      <p:nvGrpSpPr>
+        <p:cNvPr id="1" name=""/>
+        <p:cNvGrpSpPr/>
+        <p:nvPr/>
+      </p:nvGrpSpPr>
+      <p:grpSpPr>
+        <a:xfrm>
+          <a:off x="0" y="0"/>
+          <a:ext cx="0" cy="0"/>
+          <a:chOff x="0" y="0"/>
+          <a:chExt cx="0" cy="0"/>
+        </a:xfrm>
+      </p:grpSpPr>
+      <p:sp>
+        <p:nvSpPr>
+          <p:cNvPr id="2" name="Title 1">
+            <a:extLst>
+              <a:ext uri="{FF2B5EF4-FFF2-40B4-BE49-F238E27FC236}">
+                <a16:creationId xmlns:a16="http://schemas.microsoft.com/office/drawing/2014/main" id="{E3F429A9-DF7C-A95E-F99D-3D4463D51AE0}"/>
+              </a:ext>
+            </a:extLst>
+          </p:cNvPr>
+          <p:cNvSpPr>
+            <a:spLocks noGrp="1"/>
+          </p:cNvSpPr>
+          <p:nvPr>
+            <p:ph type="title"/>
+          </p:nvPr>
+        </p:nvSpPr>
+        <p:spPr/>
+        <p:txBody>
+          <a:bodyPr/>
+          <a:lstStyle/>
+          <a:p>
+            <a:r>
+              <a:rPr lang="fr-FR" dirty="0"/>
+              <a:t>Comparaison </a:t>
+            </a:r>
+            <a:r>
+              <a:rPr lang="fr-FR" dirty="0" err="1"/>
+              <a:t>EEGpal</a:t>
+            </a:r>
+            <a:r>
+              <a:rPr lang="fr-FR" dirty="0"/>
+              <a:t> </a:t>
+            </a:r>
+            <a:r>
+              <a:rPr lang="fr-FR" dirty="0" err="1"/>
+              <a:t>processing</a:t>
+            </a:r>
+            <a:r>
+              <a:rPr lang="fr-FR" dirty="0"/>
+              <a:t> </a:t>
+            </a:r>
+            <a:r>
+              <a:rPr lang="fr-FR" dirty="0" err="1"/>
+              <a:t>between</a:t>
+            </a:r>
+            <a:r>
+              <a:rPr lang="fr-FR" dirty="0"/>
+              <a:t> submission1 et submission2 sur Grand </a:t>
+            </a:r>
+            <a:r>
+              <a:rPr lang="fr-FR" dirty="0" err="1"/>
+              <a:t>Average</a:t>
+            </a:r>
+            <a:r>
+              <a:rPr lang="fr-FR" dirty="0"/>
+              <a:t> </a:t>
+            </a:r>
+            <a:endParaRPr lang="LID4096" dirty="0"/>
+          </a:p>
+        </p:txBody>
+      </p:sp>
+      <p:pic>
+        <p:nvPicPr>
+          <p:cNvPr id="5" name="Picture 4">
+            <a:extLst>
+              <a:ext uri="{FF2B5EF4-FFF2-40B4-BE49-F238E27FC236}">
+                <a16:creationId xmlns:a16="http://schemas.microsoft.com/office/drawing/2014/main" id="{029699F9-16BB-2D2D-27D1-C0E57297EFA7}"/>
+              </a:ext>
+            </a:extLst>
+          </p:cNvPr>
+          <p:cNvPicPr>
+            <a:picLocks noChangeAspect="1"/>
+          </p:cNvPicPr>
+          <p:nvPr/>
+        </p:nvPicPr>
+        <p:blipFill>
+          <a:blip r:embed="rId2"/>
+          <a:srcRect t="25195" b="10876"/>
+          <a:stretch>
+            <a:fillRect/>
+          </a:stretch>
+        </p:blipFill>
+        <p:spPr>
+          <a:xfrm>
+            <a:off x="0" y="1145513"/>
+            <a:ext cx="12192000" cy="3868615"/>
+          </a:xfrm>
+          <a:prstGeom prst="rect">
+            <a:avLst/>
+          </a:prstGeom>
+        </p:spPr>
+      </p:pic>
+      <p:sp>
+        <p:nvSpPr>
+          <p:cNvPr id="6" name="TextBox 5">
+            <a:extLst>
+              <a:ext uri="{FF2B5EF4-FFF2-40B4-BE49-F238E27FC236}">
+                <a16:creationId xmlns:a16="http://schemas.microsoft.com/office/drawing/2014/main" id="{378B1868-451D-09B5-8423-6A21E4E59EF0}"/>
+              </a:ext>
+            </a:extLst>
+          </p:cNvPr>
+          <p:cNvSpPr txBox="1"/>
+          <p:nvPr/>
+        </p:nvSpPr>
+        <p:spPr>
+          <a:xfrm>
+            <a:off x="351692" y="5285433"/>
+            <a:ext cx="6009722" cy="1477328"/>
+          </a:xfrm>
+          <a:prstGeom prst="rect">
+            <a:avLst/>
+          </a:prstGeom>
+          <a:noFill/>
+        </p:spPr>
+        <p:txBody>
+          <a:bodyPr wrap="none" rtlCol="0">
+            <a:spAutoFit/>
+          </a:bodyPr>
+          <a:lstStyle/>
+          <a:p>
+            <a:r>
+              <a:rPr lang="fr-FR" dirty="0"/>
+              <a:t>Black = </a:t>
+            </a:r>
+            <a:r>
+              <a:rPr lang="fr-FR" dirty="0" err="1"/>
+              <a:t>processing</a:t>
+            </a:r>
+            <a:r>
+              <a:rPr lang="fr-FR" dirty="0"/>
+              <a:t> effectué pour la submission1</a:t>
+            </a:r>
+          </a:p>
+          <a:p>
+            <a:r>
+              <a:rPr lang="fr-FR" dirty="0"/>
+              <a:t>Red= </a:t>
+            </a:r>
+            <a:r>
+              <a:rPr lang="fr-FR" dirty="0" err="1"/>
+              <a:t>processing</a:t>
+            </a:r>
+            <a:r>
+              <a:rPr lang="fr-FR" dirty="0"/>
+              <a:t> effectué pour la submission2 (</a:t>
+            </a:r>
+            <a:r>
+              <a:rPr lang="fr-FR" dirty="0" err="1"/>
+              <a:t>reref</a:t>
+            </a:r>
+            <a:r>
+              <a:rPr lang="fr-FR" dirty="0"/>
+              <a:t> au début)</a:t>
+            </a:r>
+          </a:p>
+          <a:p>
+            <a:endParaRPr lang="fr-FR" dirty="0"/>
+          </a:p>
+          <a:p>
+            <a:r>
+              <a:rPr lang="fr-FR" dirty="0"/>
+              <a:t>C’est exactement le même résultats !!!!!!!!!!!!!!!!!!!!!!!!!!!!</a:t>
+            </a:r>
+          </a:p>
+          <a:p>
+            <a:r>
+              <a:rPr lang="fr-FR" b="1" dirty="0"/>
+              <a:t>Ça permet aussi de valider </a:t>
+            </a:r>
+            <a:r>
+              <a:rPr lang="fr-FR" b="1" dirty="0" err="1"/>
+              <a:t>EEGpal</a:t>
+            </a:r>
+            <a:r>
+              <a:rPr lang="fr-FR" b="1" dirty="0"/>
+              <a:t> 2.2</a:t>
+            </a:r>
+            <a:endParaRPr lang="LID4096" b="1" dirty="0"/>
+          </a:p>
+        </p:txBody>
+      </p:sp>
+      <p:sp>
+        <p:nvSpPr>
+          <p:cNvPr id="7" name="TextBox 6">
+            <a:extLst>
+              <a:ext uri="{FF2B5EF4-FFF2-40B4-BE49-F238E27FC236}">
+                <a16:creationId xmlns:a16="http://schemas.microsoft.com/office/drawing/2014/main" id="{3A7D3310-2DC1-4D1A-3CA7-50EF755FAC66}"/>
+              </a:ext>
+            </a:extLst>
+          </p:cNvPr>
+          <p:cNvSpPr txBox="1"/>
+          <p:nvPr/>
+        </p:nvSpPr>
+        <p:spPr>
+          <a:xfrm>
+            <a:off x="3356553" y="4916101"/>
+            <a:ext cx="1470467" cy="369332"/>
+          </a:xfrm>
+          <a:prstGeom prst="rect">
+            <a:avLst/>
+          </a:prstGeom>
+          <a:noFill/>
+        </p:spPr>
+        <p:txBody>
+          <a:bodyPr wrap="none" rtlCol="0">
+            <a:spAutoFit/>
+          </a:bodyPr>
+          <a:lstStyle/>
+          <a:p>
+            <a:r>
+              <a:rPr lang="fr-FR" dirty="0"/>
+              <a:t>Peak a 125ms</a:t>
+            </a:r>
+            <a:endParaRPr lang="LID4096" dirty="0"/>
+          </a:p>
+        </p:txBody>
+      </p:sp>
+    </p:spTree>
+    <p:extLst>
+      <p:ext uri="{BB962C8B-B14F-4D97-AF65-F5344CB8AC3E}">
+        <p14:creationId xmlns:p14="http://schemas.microsoft.com/office/powerpoint/2010/main" val="3945025207"/>
       </p:ext>
     </p:extLst>
   </p:cSld>
